--- a/عرض_الربح_بالذكاء_الاصطناعي.pptx
+++ b/عرض_الربح_بالذكاء_الاصطناعي.pptx
@@ -10,6 +10,7 @@
     <p:sldId id="258" r:id="rId9"/>
     <p:sldId id="259" r:id="rId10"/>
     <p:sldId id="260" r:id="rId11"/>
+    <p:sldId id="261" r:id="rId12"/>
   </p:sldIdLst>
   <p:sldSz cx="9144000" cy="6858000" type="screen4x3"/>
   <p:notesSz cx="6858000" cy="9144000"/>
@@ -5254,6 +5255,1013 @@
 </file>
 
 <file path=ppt/slides/slide5.xml><?xml version="1.0" encoding="utf-8"?>
+<p:sld xmlns:a="http://schemas.openxmlformats.org/drawingml/2006/main" xmlns:p="http://schemas.openxmlformats.org/presentationml/2006/main" xmlns:r="http://schemas.openxmlformats.org/officeDocument/2006/relationships">
+  <p:cSld>
+    <p:spTree>
+      <p:nvGrpSpPr>
+        <p:cNvPr id="1" name=""/>
+        <p:cNvGrpSpPr/>
+        <p:nvPr/>
+      </p:nvGrpSpPr>
+      <p:grpSpPr/>
+      <p:sp>
+        <p:nvSpPr>
+          <p:cNvPr id="2" name="Rectangle 1"/>
+          <p:cNvSpPr/>
+          <p:nvPr/>
+        </p:nvSpPr>
+        <p:spPr>
+          <a:xfrm>
+            <a:off x="0" y="0"/>
+            <a:ext cx="9144000" cy="6858000"/>
+          </a:xfrm>
+          <a:prstGeom prst="rect">
+            <a:avLst/>
+          </a:prstGeom>
+          <a:solidFill>
+            <a:srgbClr val="111827"/>
+          </a:solidFill>
+          <a:ln>
+            <a:noFill/>
+          </a:ln>
+        </p:spPr>
+        <p:style>
+          <a:lnRef idx="1">
+            <a:schemeClr val="accent1"/>
+          </a:lnRef>
+          <a:fillRef idx="3">
+            <a:schemeClr val="accent1"/>
+          </a:fillRef>
+          <a:effectRef idx="2">
+            <a:schemeClr val="accent1"/>
+          </a:effectRef>
+          <a:fontRef idx="minor">
+            <a:schemeClr val="lt1"/>
+          </a:fontRef>
+        </p:style>
+        <p:txBody>
+          <a:bodyPr rtlCol="0" anchor="ctr"/>
+          <a:lstStyle/>
+          <a:p>
+            <a:pPr algn="ctr"/>
+          </a:p>
+        </p:txBody>
+      </p:sp>
+      <p:sp>
+        <p:nvSpPr>
+          <p:cNvPr id="3" name="TextBox 2"/>
+          <p:cNvSpPr txBox="1"/>
+          <p:nvPr/>
+        </p:nvSpPr>
+        <p:spPr>
+          <a:xfrm>
+            <a:off x="457200" y="457200"/>
+            <a:ext cx="8229600" cy="731520"/>
+          </a:xfrm>
+          <a:prstGeom prst="rect">
+            <a:avLst/>
+          </a:prstGeom>
+          <a:noFill/>
+        </p:spPr>
+        <p:txBody>
+          <a:bodyPr wrap="none">
+            <a:spAutoFit/>
+          </a:bodyPr>
+          <a:lstStyle/>
+          <a:p>
+            <a:pPr algn="ctr">
+              <a:defRPr sz="4000" b="1">
+                <a:solidFill>
+                  <a:srgbClr val="FFFFFF"/>
+                </a:solidFill>
+              </a:defRPr>
+            </a:pPr>
+            <a:r>
+              <a:t>BLACKBOXAI - أداتك السرية للربح 🚀</a:t>
+            </a:r>
+          </a:p>
+        </p:txBody>
+      </p:sp>
+      <p:sp>
+        <p:nvSpPr>
+          <p:cNvPr id="4" name="TextBox 3"/>
+          <p:cNvSpPr txBox="1"/>
+          <p:nvPr/>
+        </p:nvSpPr>
+        <p:spPr>
+          <a:xfrm>
+            <a:off x="914400" y="1371600"/>
+            <a:ext cx="7315200" cy="548640"/>
+          </a:xfrm>
+          <a:prstGeom prst="rect">
+            <a:avLst/>
+          </a:prstGeom>
+          <a:noFill/>
+        </p:spPr>
+        <p:txBody>
+          <a:bodyPr wrap="none">
+            <a:spAutoFit/>
+          </a:bodyPr>
+          <a:lstStyle/>
+          <a:p>
+            <a:pPr algn="ctr">
+              <a:defRPr sz="1800">
+                <a:solidFill>
+                  <a:srgbClr val="9CA3AF"/>
+                </a:solidFill>
+              </a:defRPr>
+            </a:pPr>
+            <a:r>
+              <a:t>منصة ذكاء اصطناعي متقدمة تساعدك على البرمجة والإبداع وتحقيق الدخل</a:t>
+            </a:r>
+          </a:p>
+        </p:txBody>
+      </p:sp>
+      <p:sp>
+        <p:nvSpPr>
+          <p:cNvPr id="5" name="Rectangle 4"/>
+          <p:cNvSpPr/>
+          <p:nvPr/>
+        </p:nvSpPr>
+        <p:spPr>
+          <a:xfrm>
+            <a:off x="731520" y="2286000"/>
+            <a:ext cx="2468880" cy="1554480"/>
+          </a:xfrm>
+          <a:prstGeom prst="rect">
+            <a:avLst/>
+          </a:prstGeom>
+          <a:solidFill>
+            <a:srgbClr val="1F2937"/>
+          </a:solidFill>
+          <a:ln w="25400">
+            <a:solidFill>
+              <a:srgbClr val="4F46E5"/>
+            </a:solidFill>
+          </a:ln>
+        </p:spPr>
+        <p:style>
+          <a:lnRef idx="1">
+            <a:schemeClr val="accent1"/>
+          </a:lnRef>
+          <a:fillRef idx="3">
+            <a:schemeClr val="accent1"/>
+          </a:fillRef>
+          <a:effectRef idx="2">
+            <a:schemeClr val="accent1"/>
+          </a:effectRef>
+          <a:fontRef idx="minor">
+            <a:schemeClr val="lt1"/>
+          </a:fontRef>
+        </p:style>
+        <p:txBody>
+          <a:bodyPr rtlCol="0" anchor="ctr"/>
+          <a:lstStyle/>
+          <a:p>
+            <a:pPr algn="ctr"/>
+          </a:p>
+        </p:txBody>
+      </p:sp>
+      <p:sp>
+        <p:nvSpPr>
+          <p:cNvPr id="6" name="TextBox 5"/>
+          <p:cNvSpPr txBox="1"/>
+          <p:nvPr/>
+        </p:nvSpPr>
+        <p:spPr>
+          <a:xfrm>
+            <a:off x="914400" y="2423160"/>
+            <a:ext cx="548640" cy="457200"/>
+          </a:xfrm>
+          <a:prstGeom prst="rect">
+            <a:avLst/>
+          </a:prstGeom>
+          <a:noFill/>
+        </p:spPr>
+        <p:txBody>
+          <a:bodyPr wrap="none">
+            <a:spAutoFit/>
+          </a:bodyPr>
+          <a:lstStyle/>
+          <a:p>
+            <a:pPr>
+              <a:defRPr sz="3200"/>
+            </a:pPr>
+            <a:r>
+              <a:t>💻</a:t>
+            </a:r>
+          </a:p>
+        </p:txBody>
+      </p:sp>
+      <p:sp>
+        <p:nvSpPr>
+          <p:cNvPr id="7" name="TextBox 6"/>
+          <p:cNvSpPr txBox="1"/>
+          <p:nvPr/>
+        </p:nvSpPr>
+        <p:spPr>
+          <a:xfrm>
+            <a:off x="914400" y="2926080"/>
+            <a:ext cx="2103120" cy="365760"/>
+          </a:xfrm>
+          <a:prstGeom prst="rect">
+            <a:avLst/>
+          </a:prstGeom>
+          <a:noFill/>
+        </p:spPr>
+        <p:txBody>
+          <a:bodyPr wrap="none">
+            <a:spAutoFit/>
+          </a:bodyPr>
+          <a:lstStyle/>
+          <a:p>
+            <a:pPr>
+              <a:defRPr sz="1400" b="1">
+                <a:solidFill>
+                  <a:srgbClr val="FFFFFF"/>
+                </a:solidFill>
+              </a:defRPr>
+            </a:pPr>
+            <a:r>
+              <a:t>كتابة الأكواد</a:t>
+            </a:r>
+          </a:p>
+        </p:txBody>
+      </p:sp>
+      <p:sp>
+        <p:nvSpPr>
+          <p:cNvPr id="8" name="TextBox 7"/>
+          <p:cNvSpPr txBox="1"/>
+          <p:nvPr/>
+        </p:nvSpPr>
+        <p:spPr>
+          <a:xfrm>
+            <a:off x="914400" y="3291840"/>
+            <a:ext cx="2103120" cy="457200"/>
+          </a:xfrm>
+          <a:prstGeom prst="rect">
+            <a:avLst/>
+          </a:prstGeom>
+          <a:noFill/>
+        </p:spPr>
+        <p:txBody>
+          <a:bodyPr wrap="square">
+            <a:spAutoFit/>
+          </a:bodyPr>
+          <a:lstStyle/>
+          <a:p>
+            <a:pPr>
+              <a:defRPr sz="1000">
+                <a:solidFill>
+                  <a:srgbClr val="9CA3AF"/>
+                </a:solidFill>
+              </a:defRPr>
+            </a:pPr>
+            <a:r>
+              <a:t>يساعدك في كتابة أكواد برمجية احترافية بجميع اللغات</a:t>
+            </a:r>
+          </a:p>
+        </p:txBody>
+      </p:sp>
+      <p:sp>
+        <p:nvSpPr>
+          <p:cNvPr id="9" name="Rectangle 8"/>
+          <p:cNvSpPr/>
+          <p:nvPr/>
+        </p:nvSpPr>
+        <p:spPr>
+          <a:xfrm>
+            <a:off x="3474720" y="2286000"/>
+            <a:ext cx="2468880" cy="1554480"/>
+          </a:xfrm>
+          <a:prstGeom prst="rect">
+            <a:avLst/>
+          </a:prstGeom>
+          <a:solidFill>
+            <a:srgbClr val="1F2937"/>
+          </a:solidFill>
+          <a:ln w="25400">
+            <a:solidFill>
+              <a:srgbClr val="4F46E5"/>
+            </a:solidFill>
+          </a:ln>
+        </p:spPr>
+        <p:style>
+          <a:lnRef idx="1">
+            <a:schemeClr val="accent1"/>
+          </a:lnRef>
+          <a:fillRef idx="3">
+            <a:schemeClr val="accent1"/>
+          </a:fillRef>
+          <a:effectRef idx="2">
+            <a:schemeClr val="accent1"/>
+          </a:effectRef>
+          <a:fontRef idx="minor">
+            <a:schemeClr val="lt1"/>
+          </a:fontRef>
+        </p:style>
+        <p:txBody>
+          <a:bodyPr rtlCol="0" anchor="ctr"/>
+          <a:lstStyle/>
+          <a:p>
+            <a:pPr algn="ctr"/>
+          </a:p>
+        </p:txBody>
+      </p:sp>
+      <p:sp>
+        <p:nvSpPr>
+          <p:cNvPr id="10" name="TextBox 9"/>
+          <p:cNvSpPr txBox="1"/>
+          <p:nvPr/>
+        </p:nvSpPr>
+        <p:spPr>
+          <a:xfrm>
+            <a:off x="3657600" y="2423160"/>
+            <a:ext cx="548640" cy="457200"/>
+          </a:xfrm>
+          <a:prstGeom prst="rect">
+            <a:avLst/>
+          </a:prstGeom>
+          <a:noFill/>
+        </p:spPr>
+        <p:txBody>
+          <a:bodyPr wrap="none">
+            <a:spAutoFit/>
+          </a:bodyPr>
+          <a:lstStyle/>
+          <a:p>
+            <a:pPr>
+              <a:defRPr sz="3200"/>
+            </a:pPr>
+            <a:r>
+              <a:t>🔍</a:t>
+            </a:r>
+          </a:p>
+        </p:txBody>
+      </p:sp>
+      <p:sp>
+        <p:nvSpPr>
+          <p:cNvPr id="11" name="TextBox 10"/>
+          <p:cNvSpPr txBox="1"/>
+          <p:nvPr/>
+        </p:nvSpPr>
+        <p:spPr>
+          <a:xfrm>
+            <a:off x="3657600" y="2926080"/>
+            <a:ext cx="2103120" cy="365760"/>
+          </a:xfrm>
+          <a:prstGeom prst="rect">
+            <a:avLst/>
+          </a:prstGeom>
+          <a:noFill/>
+        </p:spPr>
+        <p:txBody>
+          <a:bodyPr wrap="none">
+            <a:spAutoFit/>
+          </a:bodyPr>
+          <a:lstStyle/>
+          <a:p>
+            <a:pPr>
+              <a:defRPr sz="1400" b="1">
+                <a:solidFill>
+                  <a:srgbClr val="FFFFFF"/>
+                </a:solidFill>
+              </a:defRPr>
+            </a:pPr>
+            <a:r>
+              <a:t>البحث الذكي</a:t>
+            </a:r>
+          </a:p>
+        </p:txBody>
+      </p:sp>
+      <p:sp>
+        <p:nvSpPr>
+          <p:cNvPr id="12" name="TextBox 11"/>
+          <p:cNvSpPr txBox="1"/>
+          <p:nvPr/>
+        </p:nvSpPr>
+        <p:spPr>
+          <a:xfrm>
+            <a:off x="3657600" y="3291840"/>
+            <a:ext cx="2103120" cy="457200"/>
+          </a:xfrm>
+          <a:prstGeom prst="rect">
+            <a:avLst/>
+          </a:prstGeom>
+          <a:noFill/>
+        </p:spPr>
+        <p:txBody>
+          <a:bodyPr wrap="square">
+            <a:spAutoFit/>
+          </a:bodyPr>
+          <a:lstStyle/>
+          <a:p>
+            <a:pPr>
+              <a:defRPr sz="1000">
+                <a:solidFill>
+                  <a:srgbClr val="9CA3AF"/>
+                </a:solidFill>
+              </a:defRPr>
+            </a:pPr>
+            <a:r>
+              <a:t>يبحث في الإنترنت ويجلب لك أحدث المعلومات</a:t>
+            </a:r>
+          </a:p>
+        </p:txBody>
+      </p:sp>
+      <p:sp>
+        <p:nvSpPr>
+          <p:cNvPr id="13" name="Rectangle 12"/>
+          <p:cNvSpPr/>
+          <p:nvPr/>
+        </p:nvSpPr>
+        <p:spPr>
+          <a:xfrm>
+            <a:off x="6217920" y="2286000"/>
+            <a:ext cx="2468880" cy="1554480"/>
+          </a:xfrm>
+          <a:prstGeom prst="rect">
+            <a:avLst/>
+          </a:prstGeom>
+          <a:solidFill>
+            <a:srgbClr val="1F2937"/>
+          </a:solidFill>
+          <a:ln w="25400">
+            <a:solidFill>
+              <a:srgbClr val="4F46E5"/>
+            </a:solidFill>
+          </a:ln>
+        </p:spPr>
+        <p:style>
+          <a:lnRef idx="1">
+            <a:schemeClr val="accent1"/>
+          </a:lnRef>
+          <a:fillRef idx="3">
+            <a:schemeClr val="accent1"/>
+          </a:fillRef>
+          <a:effectRef idx="2">
+            <a:schemeClr val="accent1"/>
+          </a:effectRef>
+          <a:fontRef idx="minor">
+            <a:schemeClr val="lt1"/>
+          </a:fontRef>
+        </p:style>
+        <p:txBody>
+          <a:bodyPr rtlCol="0" anchor="ctr"/>
+          <a:lstStyle/>
+          <a:p>
+            <a:pPr algn="ctr"/>
+          </a:p>
+        </p:txBody>
+      </p:sp>
+      <p:sp>
+        <p:nvSpPr>
+          <p:cNvPr id="14" name="TextBox 13"/>
+          <p:cNvSpPr txBox="1"/>
+          <p:nvPr/>
+        </p:nvSpPr>
+        <p:spPr>
+          <a:xfrm>
+            <a:off x="6400800" y="2423160"/>
+            <a:ext cx="548640" cy="457200"/>
+          </a:xfrm>
+          <a:prstGeom prst="rect">
+            <a:avLst/>
+          </a:prstGeom>
+          <a:noFill/>
+        </p:spPr>
+        <p:txBody>
+          <a:bodyPr wrap="none">
+            <a:spAutoFit/>
+          </a:bodyPr>
+          <a:lstStyle/>
+          <a:p>
+            <a:pPr>
+              <a:defRPr sz="3200"/>
+            </a:pPr>
+            <a:r>
+              <a:t>📝</a:t>
+            </a:r>
+          </a:p>
+        </p:txBody>
+      </p:sp>
+      <p:sp>
+        <p:nvSpPr>
+          <p:cNvPr id="15" name="TextBox 14"/>
+          <p:cNvSpPr txBox="1"/>
+          <p:nvPr/>
+        </p:nvSpPr>
+        <p:spPr>
+          <a:xfrm>
+            <a:off x="6400800" y="2926080"/>
+            <a:ext cx="2103120" cy="365760"/>
+          </a:xfrm>
+          <a:prstGeom prst="rect">
+            <a:avLst/>
+          </a:prstGeom>
+          <a:noFill/>
+        </p:spPr>
+        <p:txBody>
+          <a:bodyPr wrap="none">
+            <a:spAutoFit/>
+          </a:bodyPr>
+          <a:lstStyle/>
+          <a:p>
+            <a:pPr>
+              <a:defRPr sz="1400" b="1">
+                <a:solidFill>
+                  <a:srgbClr val="FFFFFF"/>
+                </a:solidFill>
+              </a:defRPr>
+            </a:pPr>
+            <a:r>
+              <a:t>إنشاء المحتوى</a:t>
+            </a:r>
+          </a:p>
+        </p:txBody>
+      </p:sp>
+      <p:sp>
+        <p:nvSpPr>
+          <p:cNvPr id="16" name="TextBox 15"/>
+          <p:cNvSpPr txBox="1"/>
+          <p:nvPr/>
+        </p:nvSpPr>
+        <p:spPr>
+          <a:xfrm>
+            <a:off x="6400800" y="3291840"/>
+            <a:ext cx="2103120" cy="457200"/>
+          </a:xfrm>
+          <a:prstGeom prst="rect">
+            <a:avLst/>
+          </a:prstGeom>
+          <a:noFill/>
+        </p:spPr>
+        <p:txBody>
+          <a:bodyPr wrap="square">
+            <a:spAutoFit/>
+          </a:bodyPr>
+          <a:lstStyle/>
+          <a:p>
+            <a:pPr>
+              <a:defRPr sz="1000">
+                <a:solidFill>
+                  <a:srgbClr val="9CA3AF"/>
+                </a:solidFill>
+              </a:defRPr>
+            </a:pPr>
+            <a:r>
+              <a:t>يكتب مقالات ومحتوى تسويقي عالي الجودة</a:t>
+            </a:r>
+          </a:p>
+        </p:txBody>
+      </p:sp>
+      <p:sp>
+        <p:nvSpPr>
+          <p:cNvPr id="17" name="Rectangle 16"/>
+          <p:cNvSpPr/>
+          <p:nvPr/>
+        </p:nvSpPr>
+        <p:spPr>
+          <a:xfrm>
+            <a:off x="731520" y="4114800"/>
+            <a:ext cx="2468880" cy="1554480"/>
+          </a:xfrm>
+          <a:prstGeom prst="rect">
+            <a:avLst/>
+          </a:prstGeom>
+          <a:solidFill>
+            <a:srgbClr val="1F2937"/>
+          </a:solidFill>
+          <a:ln w="25400">
+            <a:solidFill>
+              <a:srgbClr val="4F46E5"/>
+            </a:solidFill>
+          </a:ln>
+        </p:spPr>
+        <p:style>
+          <a:lnRef idx="1">
+            <a:schemeClr val="accent1"/>
+          </a:lnRef>
+          <a:fillRef idx="3">
+            <a:schemeClr val="accent1"/>
+          </a:fillRef>
+          <a:effectRef idx="2">
+            <a:schemeClr val="accent1"/>
+          </a:effectRef>
+          <a:fontRef idx="minor">
+            <a:schemeClr val="lt1"/>
+          </a:fontRef>
+        </p:style>
+        <p:txBody>
+          <a:bodyPr rtlCol="0" anchor="ctr"/>
+          <a:lstStyle/>
+          <a:p>
+            <a:pPr algn="ctr"/>
+          </a:p>
+        </p:txBody>
+      </p:sp>
+      <p:sp>
+        <p:nvSpPr>
+          <p:cNvPr id="18" name="TextBox 17"/>
+          <p:cNvSpPr txBox="1"/>
+          <p:nvPr/>
+        </p:nvSpPr>
+        <p:spPr>
+          <a:xfrm>
+            <a:off x="914400" y="4251960"/>
+            <a:ext cx="548640" cy="457200"/>
+          </a:xfrm>
+          <a:prstGeom prst="rect">
+            <a:avLst/>
+          </a:prstGeom>
+          <a:noFill/>
+        </p:spPr>
+        <p:txBody>
+          <a:bodyPr wrap="none">
+            <a:spAutoFit/>
+          </a:bodyPr>
+          <a:lstStyle/>
+          <a:p>
+            <a:pPr>
+              <a:defRPr sz="3200"/>
+            </a:pPr>
+            <a:r>
+              <a:t>🎨</a:t>
+            </a:r>
+          </a:p>
+        </p:txBody>
+      </p:sp>
+      <p:sp>
+        <p:nvSpPr>
+          <p:cNvPr id="19" name="TextBox 18"/>
+          <p:cNvSpPr txBox="1"/>
+          <p:nvPr/>
+        </p:nvSpPr>
+        <p:spPr>
+          <a:xfrm>
+            <a:off x="914400" y="4754880"/>
+            <a:ext cx="2103120" cy="365760"/>
+          </a:xfrm>
+          <a:prstGeom prst="rect">
+            <a:avLst/>
+          </a:prstGeom>
+          <a:noFill/>
+        </p:spPr>
+        <p:txBody>
+          <a:bodyPr wrap="none">
+            <a:spAutoFit/>
+          </a:bodyPr>
+          <a:lstStyle/>
+          <a:p>
+            <a:pPr>
+              <a:defRPr sz="1400" b="1">
+                <a:solidFill>
+                  <a:srgbClr val="FFFFFF"/>
+                </a:solidFill>
+              </a:defRPr>
+            </a:pPr>
+            <a:r>
+              <a:t>توليد الصور</a:t>
+            </a:r>
+          </a:p>
+        </p:txBody>
+      </p:sp>
+      <p:sp>
+        <p:nvSpPr>
+          <p:cNvPr id="20" name="TextBox 19"/>
+          <p:cNvSpPr txBox="1"/>
+          <p:nvPr/>
+        </p:nvSpPr>
+        <p:spPr>
+          <a:xfrm>
+            <a:off x="914400" y="5120640"/>
+            <a:ext cx="2103120" cy="457200"/>
+          </a:xfrm>
+          <a:prstGeom prst="rect">
+            <a:avLst/>
+          </a:prstGeom>
+          <a:noFill/>
+        </p:spPr>
+        <p:txBody>
+          <a:bodyPr wrap="square">
+            <a:spAutoFit/>
+          </a:bodyPr>
+          <a:lstStyle/>
+          <a:p>
+            <a:pPr>
+              <a:defRPr sz="1000">
+                <a:solidFill>
+                  <a:srgbClr val="9CA3AF"/>
+                </a:solidFill>
+              </a:defRPr>
+            </a:pPr>
+            <a:r>
+              <a:t>ينشئ صور فريدة باستخدام الذكاء الاصطناعي</a:t>
+            </a:r>
+          </a:p>
+        </p:txBody>
+      </p:sp>
+      <p:sp>
+        <p:nvSpPr>
+          <p:cNvPr id="21" name="Rectangle 20"/>
+          <p:cNvSpPr/>
+          <p:nvPr/>
+        </p:nvSpPr>
+        <p:spPr>
+          <a:xfrm>
+            <a:off x="3474720" y="4114800"/>
+            <a:ext cx="2468880" cy="1554480"/>
+          </a:xfrm>
+          <a:prstGeom prst="rect">
+            <a:avLst/>
+          </a:prstGeom>
+          <a:solidFill>
+            <a:srgbClr val="1F2937"/>
+          </a:solidFill>
+          <a:ln w="25400">
+            <a:solidFill>
+              <a:srgbClr val="4F46E5"/>
+            </a:solidFill>
+          </a:ln>
+        </p:spPr>
+        <p:style>
+          <a:lnRef idx="1">
+            <a:schemeClr val="accent1"/>
+          </a:lnRef>
+          <a:fillRef idx="3">
+            <a:schemeClr val="accent1"/>
+          </a:fillRef>
+          <a:effectRef idx="2">
+            <a:schemeClr val="accent1"/>
+          </a:effectRef>
+          <a:fontRef idx="minor">
+            <a:schemeClr val="lt1"/>
+          </a:fontRef>
+        </p:style>
+        <p:txBody>
+          <a:bodyPr rtlCol="0" anchor="ctr"/>
+          <a:lstStyle/>
+          <a:p>
+            <a:pPr algn="ctr"/>
+          </a:p>
+        </p:txBody>
+      </p:sp>
+      <p:sp>
+        <p:nvSpPr>
+          <p:cNvPr id="22" name="TextBox 21"/>
+          <p:cNvSpPr txBox="1"/>
+          <p:nvPr/>
+        </p:nvSpPr>
+        <p:spPr>
+          <a:xfrm>
+            <a:off x="3657600" y="4251960"/>
+            <a:ext cx="548640" cy="457200"/>
+          </a:xfrm>
+          <a:prstGeom prst="rect">
+            <a:avLst/>
+          </a:prstGeom>
+          <a:noFill/>
+        </p:spPr>
+        <p:txBody>
+          <a:bodyPr wrap="none">
+            <a:spAutoFit/>
+          </a:bodyPr>
+          <a:lstStyle/>
+          <a:p>
+            <a:pPr>
+              <a:defRPr sz="3200"/>
+            </a:pPr>
+            <a:r>
+              <a:t>⚡</a:t>
+            </a:r>
+          </a:p>
+        </p:txBody>
+      </p:sp>
+      <p:sp>
+        <p:nvSpPr>
+          <p:cNvPr id="23" name="TextBox 22"/>
+          <p:cNvSpPr txBox="1"/>
+          <p:nvPr/>
+        </p:nvSpPr>
+        <p:spPr>
+          <a:xfrm>
+            <a:off x="3657600" y="4754880"/>
+            <a:ext cx="2103120" cy="365760"/>
+          </a:xfrm>
+          <a:prstGeom prst="rect">
+            <a:avLst/>
+          </a:prstGeom>
+          <a:noFill/>
+        </p:spPr>
+        <p:txBody>
+          <a:bodyPr wrap="none">
+            <a:spAutoFit/>
+          </a:bodyPr>
+          <a:lstStyle/>
+          <a:p>
+            <a:pPr>
+              <a:defRPr sz="1400" b="1">
+                <a:solidFill>
+                  <a:srgbClr val="FFFFFF"/>
+                </a:solidFill>
+              </a:defRPr>
+            </a:pPr>
+            <a:r>
+              <a:t>سرعة فائقة</a:t>
+            </a:r>
+          </a:p>
+        </p:txBody>
+      </p:sp>
+      <p:sp>
+        <p:nvSpPr>
+          <p:cNvPr id="24" name="TextBox 23"/>
+          <p:cNvSpPr txBox="1"/>
+          <p:nvPr/>
+        </p:nvSpPr>
+        <p:spPr>
+          <a:xfrm>
+            <a:off x="3657600" y="5120640"/>
+            <a:ext cx="2103120" cy="457200"/>
+          </a:xfrm>
+          <a:prstGeom prst="rect">
+            <a:avLst/>
+          </a:prstGeom>
+          <a:noFill/>
+        </p:spPr>
+        <p:txBody>
+          <a:bodyPr wrap="square">
+            <a:spAutoFit/>
+          </a:bodyPr>
+          <a:lstStyle/>
+          <a:p>
+            <a:pPr>
+              <a:defRPr sz="1000">
+                <a:solidFill>
+                  <a:srgbClr val="9CA3AF"/>
+                </a:solidFill>
+              </a:defRPr>
+            </a:pPr>
+            <a:r>
+              <a:t>استجابة فورية وأداء ممتاز</a:t>
+            </a:r>
+          </a:p>
+        </p:txBody>
+      </p:sp>
+      <p:sp>
+        <p:nvSpPr>
+          <p:cNvPr id="25" name="Rectangle 24"/>
+          <p:cNvSpPr/>
+          <p:nvPr/>
+        </p:nvSpPr>
+        <p:spPr>
+          <a:xfrm>
+            <a:off x="6217920" y="4114800"/>
+            <a:ext cx="2468880" cy="1554480"/>
+          </a:xfrm>
+          <a:prstGeom prst="rect">
+            <a:avLst/>
+          </a:prstGeom>
+          <a:solidFill>
+            <a:srgbClr val="1F2937"/>
+          </a:solidFill>
+          <a:ln w="25400">
+            <a:solidFill>
+              <a:srgbClr val="4F46E5"/>
+            </a:solidFill>
+          </a:ln>
+        </p:spPr>
+        <p:style>
+          <a:lnRef idx="1">
+            <a:schemeClr val="accent1"/>
+          </a:lnRef>
+          <a:fillRef idx="3">
+            <a:schemeClr val="accent1"/>
+          </a:fillRef>
+          <a:effectRef idx="2">
+            <a:schemeClr val="accent1"/>
+          </a:effectRef>
+          <a:fontRef idx="minor">
+            <a:schemeClr val="lt1"/>
+          </a:fontRef>
+        </p:style>
+        <p:txBody>
+          <a:bodyPr rtlCol="0" anchor="ctr"/>
+          <a:lstStyle/>
+          <a:p>
+            <a:pPr algn="ctr"/>
+          </a:p>
+        </p:txBody>
+      </p:sp>
+      <p:sp>
+        <p:nvSpPr>
+          <p:cNvPr id="26" name="TextBox 25"/>
+          <p:cNvSpPr txBox="1"/>
+          <p:nvPr/>
+        </p:nvSpPr>
+        <p:spPr>
+          <a:xfrm>
+            <a:off x="6400800" y="4251960"/>
+            <a:ext cx="548640" cy="457200"/>
+          </a:xfrm>
+          <a:prstGeom prst="rect">
+            <a:avLst/>
+          </a:prstGeom>
+          <a:noFill/>
+        </p:spPr>
+        <p:txBody>
+          <a:bodyPr wrap="none">
+            <a:spAutoFit/>
+          </a:bodyPr>
+          <a:lstStyle/>
+          <a:p>
+            <a:pPr>
+              <a:defRPr sz="3200"/>
+            </a:pPr>
+            <a:r>
+              <a:t>🆓</a:t>
+            </a:r>
+          </a:p>
+        </p:txBody>
+      </p:sp>
+      <p:sp>
+        <p:nvSpPr>
+          <p:cNvPr id="27" name="TextBox 26"/>
+          <p:cNvSpPr txBox="1"/>
+          <p:nvPr/>
+        </p:nvSpPr>
+        <p:spPr>
+          <a:xfrm>
+            <a:off x="6400800" y="4754880"/>
+            <a:ext cx="2103120" cy="365760"/>
+          </a:xfrm>
+          <a:prstGeom prst="rect">
+            <a:avLst/>
+          </a:prstGeom>
+          <a:noFill/>
+        </p:spPr>
+        <p:txBody>
+          <a:bodyPr wrap="none">
+            <a:spAutoFit/>
+          </a:bodyPr>
+          <a:lstStyle/>
+          <a:p>
+            <a:pPr>
+              <a:defRPr sz="1400" b="1">
+                <a:solidFill>
+                  <a:srgbClr val="FFFFFF"/>
+                </a:solidFill>
+              </a:defRPr>
+            </a:pPr>
+            <a:r>
+              <a:t>مجاني للبدء</a:t>
+            </a:r>
+          </a:p>
+        </p:txBody>
+      </p:sp>
+      <p:sp>
+        <p:nvSpPr>
+          <p:cNvPr id="28" name="TextBox 27"/>
+          <p:cNvSpPr txBox="1"/>
+          <p:nvPr/>
+        </p:nvSpPr>
+        <p:spPr>
+          <a:xfrm>
+            <a:off x="6400800" y="5120640"/>
+            <a:ext cx="2103120" cy="457200"/>
+          </a:xfrm>
+          <a:prstGeom prst="rect">
+            <a:avLst/>
+          </a:prstGeom>
+          <a:noFill/>
+        </p:spPr>
+        <p:txBody>
+          <a:bodyPr wrap="square">
+            <a:spAutoFit/>
+          </a:bodyPr>
+          <a:lstStyle/>
+          <a:p>
+            <a:pPr>
+              <a:defRPr sz="1000">
+                <a:solidFill>
+                  <a:srgbClr val="9CA3AF"/>
+                </a:solidFill>
+              </a:defRPr>
+            </a:pPr>
+            <a:r>
+              <a:t>ابدأ مجاناً واستكشف الإمكانيات</a:t>
+            </a:r>
+          </a:p>
+        </p:txBody>
+      </p:sp>
+    </p:spTree>
+  </p:cSld>
+  <p:clrMapOvr>
+    <a:masterClrMapping/>
+  </p:clrMapOvr>
+</p:sld>
+</file>
+
+<file path=ppt/slides/slide6.xml><?xml version="1.0" encoding="utf-8"?>
 <p:sld xmlns:a="http://schemas.openxmlformats.org/drawingml/2006/main" xmlns:p="http://schemas.openxmlformats.org/presentationml/2006/main" xmlns:r="http://schemas.openxmlformats.org/officeDocument/2006/relationships">
   <p:cSld>
     <p:spTree>

--- a/عرض_الربح_بالذكاء_الاصطناعي.pptx
+++ b/عرض_الربح_بالذكاء_الاصطناعي.pptx
@@ -10,6 +10,7 @@
     <p:sldId id="258" r:id="rId9"/>
     <p:sldId id="259" r:id="rId10"/>
     <p:sldId id="260" r:id="rId11"/>
+    <p:sldId id="261" r:id="rId12"/>
   </p:sldIdLst>
   <p:sldSz cx="9144000" cy="6858000" type="screen4x3"/>
   <p:notesSz cx="6858000" cy="9144000"/>
@@ -6248,6 +6249,756 @@
             </a:pPr>
             <a:r>
               <a:t>🚀 ابدأ رحلتك نحو الربح من الذكاء الاصطناعي اليوم!</a:t>
+            </a:r>
+          </a:p>
+        </p:txBody>
+      </p:sp>
+    </p:spTree>
+  </p:cSld>
+  <p:clrMapOvr>
+    <a:masterClrMapping/>
+  </p:clrMapOvr>
+</p:sld>
+</file>
+
+<file path=ppt/slides/slide6.xml><?xml version="1.0" encoding="utf-8"?>
+<p:sld xmlns:a="http://schemas.openxmlformats.org/drawingml/2006/main" xmlns:p="http://schemas.openxmlformats.org/presentationml/2006/main" xmlns:r="http://schemas.openxmlformats.org/officeDocument/2006/relationships">
+  <p:cSld>
+    <p:spTree>
+      <p:nvGrpSpPr>
+        <p:cNvPr id="1" name=""/>
+        <p:cNvGrpSpPr/>
+        <p:nvPr/>
+      </p:nvGrpSpPr>
+      <p:grpSpPr/>
+      <p:sp>
+        <p:nvSpPr>
+          <p:cNvPr id="2" name="Rectangle 1"/>
+          <p:cNvSpPr/>
+          <p:nvPr/>
+        </p:nvSpPr>
+        <p:spPr>
+          <a:xfrm>
+            <a:off x="0" y="0"/>
+            <a:ext cx="9144000" cy="6858000"/>
+          </a:xfrm>
+          <a:prstGeom prst="rect">
+            <a:avLst/>
+          </a:prstGeom>
+          <a:solidFill>
+            <a:srgbClr val="111827"/>
+          </a:solidFill>
+          <a:ln>
+            <a:noFill/>
+          </a:ln>
+        </p:spPr>
+        <p:style>
+          <a:lnRef idx="1">
+            <a:schemeClr val="accent1"/>
+          </a:lnRef>
+          <a:fillRef idx="3">
+            <a:schemeClr val="accent1"/>
+          </a:fillRef>
+          <a:effectRef idx="2">
+            <a:schemeClr val="accent1"/>
+          </a:effectRef>
+          <a:fontRef idx="minor">
+            <a:schemeClr val="lt1"/>
+          </a:fontRef>
+        </p:style>
+        <p:txBody>
+          <a:bodyPr rtlCol="0" anchor="ctr"/>
+          <a:lstStyle/>
+          <a:p>
+            <a:pPr algn="ctr"/>
+          </a:p>
+        </p:txBody>
+      </p:sp>
+      <p:sp>
+        <p:nvSpPr>
+          <p:cNvPr id="3" name="TextBox 2"/>
+          <p:cNvSpPr txBox="1"/>
+          <p:nvPr/>
+        </p:nvSpPr>
+        <p:spPr>
+          <a:xfrm>
+            <a:off x="457200" y="457200"/>
+            <a:ext cx="8229600" cy="731520"/>
+          </a:xfrm>
+          <a:prstGeom prst="rect">
+            <a:avLst/>
+          </a:prstGeom>
+          <a:noFill/>
+        </p:spPr>
+        <p:txBody>
+          <a:bodyPr wrap="none">
+            <a:spAutoFit/>
+          </a:bodyPr>
+          <a:lstStyle/>
+          <a:p>
+            <a:pPr algn="ctr">
+              <a:defRPr sz="4800" b="1">
+                <a:solidFill>
+                  <a:srgbClr val="9333EA"/>
+                </a:solidFill>
+              </a:defRPr>
+            </a:pPr>
+            <a:r>
+              <a:t>BLACKBOXAI 🎯</a:t>
+            </a:r>
+          </a:p>
+        </p:txBody>
+      </p:sp>
+      <p:sp>
+        <p:nvSpPr>
+          <p:cNvPr id="4" name="TextBox 3"/>
+          <p:cNvSpPr txBox="1"/>
+          <p:nvPr/>
+        </p:nvSpPr>
+        <p:spPr>
+          <a:xfrm>
+            <a:off x="457200" y="1188720"/>
+            <a:ext cx="8229600" cy="457200"/>
+          </a:xfrm>
+          <a:prstGeom prst="rect">
+            <a:avLst/>
+          </a:prstGeom>
+          <a:noFill/>
+        </p:spPr>
+        <p:txBody>
+          <a:bodyPr wrap="none">
+            <a:spAutoFit/>
+          </a:bodyPr>
+          <a:lstStyle/>
+          <a:p>
+            <a:pPr algn="ctr">
+              <a:defRPr sz="2000">
+                <a:solidFill>
+                  <a:srgbClr val="D1D5DB"/>
+                </a:solidFill>
+              </a:defRPr>
+            </a:pPr>
+            <a:r>
+              <a:t>أداة الذكاء الاصطناعي المتقدمة للمطورين والمبدعين</a:t>
+            </a:r>
+          </a:p>
+        </p:txBody>
+      </p:sp>
+      <p:sp>
+        <p:nvSpPr>
+          <p:cNvPr id="5" name="Rectangle 4"/>
+          <p:cNvSpPr/>
+          <p:nvPr/>
+        </p:nvSpPr>
+        <p:spPr>
+          <a:xfrm>
+            <a:off x="914400" y="2011680"/>
+            <a:ext cx="3474720" cy="1645920"/>
+          </a:xfrm>
+          <a:prstGeom prst="rect">
+            <a:avLst/>
+          </a:prstGeom>
+          <a:solidFill>
+            <a:srgbClr val="1F2937"/>
+          </a:solidFill>
+          <a:ln w="25400">
+            <a:solidFill>
+              <a:srgbClr val="9333EA"/>
+            </a:solidFill>
+          </a:ln>
+        </p:spPr>
+        <p:style>
+          <a:lnRef idx="1">
+            <a:schemeClr val="accent1"/>
+          </a:lnRef>
+          <a:fillRef idx="3">
+            <a:schemeClr val="accent1"/>
+          </a:fillRef>
+          <a:effectRef idx="2">
+            <a:schemeClr val="accent1"/>
+          </a:effectRef>
+          <a:fontRef idx="minor">
+            <a:schemeClr val="lt1"/>
+          </a:fontRef>
+        </p:style>
+        <p:txBody>
+          <a:bodyPr rtlCol="0" anchor="ctr"/>
+          <a:lstStyle/>
+          <a:p>
+            <a:pPr algn="ctr"/>
+          </a:p>
+        </p:txBody>
+      </p:sp>
+      <p:sp>
+        <p:nvSpPr>
+          <p:cNvPr id="6" name="TextBox 5"/>
+          <p:cNvSpPr txBox="1"/>
+          <p:nvPr/>
+        </p:nvSpPr>
+        <p:spPr>
+          <a:xfrm>
+            <a:off x="1097280" y="2148840"/>
+            <a:ext cx="548640" cy="457200"/>
+          </a:xfrm>
+          <a:prstGeom prst="rect">
+            <a:avLst/>
+          </a:prstGeom>
+          <a:noFill/>
+        </p:spPr>
+        <p:txBody>
+          <a:bodyPr wrap="none">
+            <a:spAutoFit/>
+          </a:bodyPr>
+          <a:lstStyle/>
+          <a:p>
+            <a:pPr>
+              <a:defRPr sz="3200"/>
+            </a:pPr>
+            <a:r>
+              <a:t>💻</a:t>
+            </a:r>
+          </a:p>
+        </p:txBody>
+      </p:sp>
+      <p:sp>
+        <p:nvSpPr>
+          <p:cNvPr id="7" name="TextBox 6"/>
+          <p:cNvSpPr txBox="1"/>
+          <p:nvPr/>
+        </p:nvSpPr>
+        <p:spPr>
+          <a:xfrm>
+            <a:off x="1097280" y="2651760"/>
+            <a:ext cx="3108960" cy="365760"/>
+          </a:xfrm>
+          <a:prstGeom prst="rect">
+            <a:avLst/>
+          </a:prstGeom>
+          <a:noFill/>
+        </p:spPr>
+        <p:txBody>
+          <a:bodyPr wrap="none">
+            <a:spAutoFit/>
+          </a:bodyPr>
+          <a:lstStyle/>
+          <a:p>
+            <a:pPr>
+              <a:defRPr sz="1600" b="1">
+                <a:solidFill>
+                  <a:srgbClr val="A78BFA"/>
+                </a:solidFill>
+              </a:defRPr>
+            </a:pPr>
+            <a:r>
+              <a:t>كتابة الأكواد البرمجية</a:t>
+            </a:r>
+          </a:p>
+        </p:txBody>
+      </p:sp>
+      <p:sp>
+        <p:nvSpPr>
+          <p:cNvPr id="8" name="TextBox 7"/>
+          <p:cNvSpPr txBox="1"/>
+          <p:nvPr/>
+        </p:nvSpPr>
+        <p:spPr>
+          <a:xfrm>
+            <a:off x="1097280" y="3017520"/>
+            <a:ext cx="3108960" cy="548640"/>
+          </a:xfrm>
+          <a:prstGeom prst="rect">
+            <a:avLst/>
+          </a:prstGeom>
+          <a:noFill/>
+        </p:spPr>
+        <p:txBody>
+          <a:bodyPr wrap="square">
+            <a:spAutoFit/>
+          </a:bodyPr>
+          <a:lstStyle/>
+          <a:p>
+            <a:pPr>
+              <a:defRPr sz="1100">
+                <a:solidFill>
+                  <a:srgbClr val="D1D5DB"/>
+                </a:solidFill>
+              </a:defRPr>
+            </a:pPr>
+            <a:r>
+              <a:t>يساعدك في كتابة أكواد احترافية بجميع لغات البرمجة بسرعة ودقة عالية</a:t>
+            </a:r>
+          </a:p>
+        </p:txBody>
+      </p:sp>
+      <p:sp>
+        <p:nvSpPr>
+          <p:cNvPr id="9" name="Rectangle 8"/>
+          <p:cNvSpPr/>
+          <p:nvPr/>
+        </p:nvSpPr>
+        <p:spPr>
+          <a:xfrm>
+            <a:off x="5029200" y="2011680"/>
+            <a:ext cx="3474720" cy="1645920"/>
+          </a:xfrm>
+          <a:prstGeom prst="rect">
+            <a:avLst/>
+          </a:prstGeom>
+          <a:solidFill>
+            <a:srgbClr val="1F2937"/>
+          </a:solidFill>
+          <a:ln w="25400">
+            <a:solidFill>
+              <a:srgbClr val="9333EA"/>
+            </a:solidFill>
+          </a:ln>
+        </p:spPr>
+        <p:style>
+          <a:lnRef idx="1">
+            <a:schemeClr val="accent1"/>
+          </a:lnRef>
+          <a:fillRef idx="3">
+            <a:schemeClr val="accent1"/>
+          </a:fillRef>
+          <a:effectRef idx="2">
+            <a:schemeClr val="accent1"/>
+          </a:effectRef>
+          <a:fontRef idx="minor">
+            <a:schemeClr val="lt1"/>
+          </a:fontRef>
+        </p:style>
+        <p:txBody>
+          <a:bodyPr rtlCol="0" anchor="ctr"/>
+          <a:lstStyle/>
+          <a:p>
+            <a:pPr algn="ctr"/>
+          </a:p>
+        </p:txBody>
+      </p:sp>
+      <p:sp>
+        <p:nvSpPr>
+          <p:cNvPr id="10" name="TextBox 9"/>
+          <p:cNvSpPr txBox="1"/>
+          <p:nvPr/>
+        </p:nvSpPr>
+        <p:spPr>
+          <a:xfrm>
+            <a:off x="5212080" y="2148840"/>
+            <a:ext cx="548640" cy="457200"/>
+          </a:xfrm>
+          <a:prstGeom prst="rect">
+            <a:avLst/>
+          </a:prstGeom>
+          <a:noFill/>
+        </p:spPr>
+        <p:txBody>
+          <a:bodyPr wrap="none">
+            <a:spAutoFit/>
+          </a:bodyPr>
+          <a:lstStyle/>
+          <a:p>
+            <a:pPr>
+              <a:defRPr sz="3200"/>
+            </a:pPr>
+            <a:r>
+              <a:t>🔍</a:t>
+            </a:r>
+          </a:p>
+        </p:txBody>
+      </p:sp>
+      <p:sp>
+        <p:nvSpPr>
+          <p:cNvPr id="11" name="TextBox 10"/>
+          <p:cNvSpPr txBox="1"/>
+          <p:nvPr/>
+        </p:nvSpPr>
+        <p:spPr>
+          <a:xfrm>
+            <a:off x="5212080" y="2651760"/>
+            <a:ext cx="3108960" cy="365760"/>
+          </a:xfrm>
+          <a:prstGeom prst="rect">
+            <a:avLst/>
+          </a:prstGeom>
+          <a:noFill/>
+        </p:spPr>
+        <p:txBody>
+          <a:bodyPr wrap="none">
+            <a:spAutoFit/>
+          </a:bodyPr>
+          <a:lstStyle/>
+          <a:p>
+            <a:pPr>
+              <a:defRPr sz="1600" b="1">
+                <a:solidFill>
+                  <a:srgbClr val="A78BFA"/>
+                </a:solidFill>
+              </a:defRPr>
+            </a:pPr>
+            <a:r>
+              <a:t>البحث الذكي في الأكواد</a:t>
+            </a:r>
+          </a:p>
+        </p:txBody>
+      </p:sp>
+      <p:sp>
+        <p:nvSpPr>
+          <p:cNvPr id="12" name="TextBox 11"/>
+          <p:cNvSpPr txBox="1"/>
+          <p:nvPr/>
+        </p:nvSpPr>
+        <p:spPr>
+          <a:xfrm>
+            <a:off x="5212080" y="3017520"/>
+            <a:ext cx="3108960" cy="548640"/>
+          </a:xfrm>
+          <a:prstGeom prst="rect">
+            <a:avLst/>
+          </a:prstGeom>
+          <a:noFill/>
+        </p:spPr>
+        <p:txBody>
+          <a:bodyPr wrap="square">
+            <a:spAutoFit/>
+          </a:bodyPr>
+          <a:lstStyle/>
+          <a:p>
+            <a:pPr>
+              <a:defRPr sz="1100">
+                <a:solidFill>
+                  <a:srgbClr val="D1D5DB"/>
+                </a:solidFill>
+              </a:defRPr>
+            </a:pPr>
+            <a:r>
+              <a:t>يبحث في ملايين الأكواد المفتوحة المصدر لإيجاد الحلول الأمثل</a:t>
+            </a:r>
+          </a:p>
+        </p:txBody>
+      </p:sp>
+      <p:sp>
+        <p:nvSpPr>
+          <p:cNvPr id="13" name="Rectangle 12"/>
+          <p:cNvSpPr/>
+          <p:nvPr/>
+        </p:nvSpPr>
+        <p:spPr>
+          <a:xfrm>
+            <a:off x="914400" y="4114800"/>
+            <a:ext cx="3474720" cy="1645920"/>
+          </a:xfrm>
+          <a:prstGeom prst="rect">
+            <a:avLst/>
+          </a:prstGeom>
+          <a:solidFill>
+            <a:srgbClr val="1F2937"/>
+          </a:solidFill>
+          <a:ln w="25400">
+            <a:solidFill>
+              <a:srgbClr val="9333EA"/>
+            </a:solidFill>
+          </a:ln>
+        </p:spPr>
+        <p:style>
+          <a:lnRef idx="1">
+            <a:schemeClr val="accent1"/>
+          </a:lnRef>
+          <a:fillRef idx="3">
+            <a:schemeClr val="accent1"/>
+          </a:fillRef>
+          <a:effectRef idx="2">
+            <a:schemeClr val="accent1"/>
+          </a:effectRef>
+          <a:fontRef idx="minor">
+            <a:schemeClr val="lt1"/>
+          </a:fontRef>
+        </p:style>
+        <p:txBody>
+          <a:bodyPr rtlCol="0" anchor="ctr"/>
+          <a:lstStyle/>
+          <a:p>
+            <a:pPr algn="ctr"/>
+          </a:p>
+        </p:txBody>
+      </p:sp>
+      <p:sp>
+        <p:nvSpPr>
+          <p:cNvPr id="14" name="TextBox 13"/>
+          <p:cNvSpPr txBox="1"/>
+          <p:nvPr/>
+        </p:nvSpPr>
+        <p:spPr>
+          <a:xfrm>
+            <a:off x="1097280" y="4251960"/>
+            <a:ext cx="548640" cy="457200"/>
+          </a:xfrm>
+          <a:prstGeom prst="rect">
+            <a:avLst/>
+          </a:prstGeom>
+          <a:noFill/>
+        </p:spPr>
+        <p:txBody>
+          <a:bodyPr wrap="none">
+            <a:spAutoFit/>
+          </a:bodyPr>
+          <a:lstStyle/>
+          <a:p>
+            <a:pPr>
+              <a:defRPr sz="3200"/>
+            </a:pPr>
+            <a:r>
+              <a:t>🚀</a:t>
+            </a:r>
+          </a:p>
+        </p:txBody>
+      </p:sp>
+      <p:sp>
+        <p:nvSpPr>
+          <p:cNvPr id="15" name="TextBox 14"/>
+          <p:cNvSpPr txBox="1"/>
+          <p:nvPr/>
+        </p:nvSpPr>
+        <p:spPr>
+          <a:xfrm>
+            <a:off x="1097280" y="4754880"/>
+            <a:ext cx="3108960" cy="365760"/>
+          </a:xfrm>
+          <a:prstGeom prst="rect">
+            <a:avLst/>
+          </a:prstGeom>
+          <a:noFill/>
+        </p:spPr>
+        <p:txBody>
+          <a:bodyPr wrap="none">
+            <a:spAutoFit/>
+          </a:bodyPr>
+          <a:lstStyle/>
+          <a:p>
+            <a:pPr>
+              <a:defRPr sz="1600" b="1">
+                <a:solidFill>
+                  <a:srgbClr val="A78BFA"/>
+                </a:solidFill>
+              </a:defRPr>
+            </a:pPr>
+            <a:r>
+              <a:t>تسريع التطوير</a:t>
+            </a:r>
+          </a:p>
+        </p:txBody>
+      </p:sp>
+      <p:sp>
+        <p:nvSpPr>
+          <p:cNvPr id="16" name="TextBox 15"/>
+          <p:cNvSpPr txBox="1"/>
+          <p:nvPr/>
+        </p:nvSpPr>
+        <p:spPr>
+          <a:xfrm>
+            <a:off x="1097280" y="5120640"/>
+            <a:ext cx="3108960" cy="548640"/>
+          </a:xfrm>
+          <a:prstGeom prst="rect">
+            <a:avLst/>
+          </a:prstGeom>
+          <a:noFill/>
+        </p:spPr>
+        <p:txBody>
+          <a:bodyPr wrap="square">
+            <a:spAutoFit/>
+          </a:bodyPr>
+          <a:lstStyle/>
+          <a:p>
+            <a:pPr>
+              <a:defRPr sz="1100">
+                <a:solidFill>
+                  <a:srgbClr val="D1D5DB"/>
+                </a:solidFill>
+              </a:defRPr>
+            </a:pPr>
+            <a:r>
+              <a:t>يوفر 70% من وقت البرمجة ويزيد الإنتاجية بشكل هائل</a:t>
+            </a:r>
+          </a:p>
+        </p:txBody>
+      </p:sp>
+      <p:sp>
+        <p:nvSpPr>
+          <p:cNvPr id="17" name="Rectangle 16"/>
+          <p:cNvSpPr/>
+          <p:nvPr/>
+        </p:nvSpPr>
+        <p:spPr>
+          <a:xfrm>
+            <a:off x="5029200" y="4114800"/>
+            <a:ext cx="3474720" cy="1645920"/>
+          </a:xfrm>
+          <a:prstGeom prst="rect">
+            <a:avLst/>
+          </a:prstGeom>
+          <a:solidFill>
+            <a:srgbClr val="1F2937"/>
+          </a:solidFill>
+          <a:ln w="25400">
+            <a:solidFill>
+              <a:srgbClr val="9333EA"/>
+            </a:solidFill>
+          </a:ln>
+        </p:spPr>
+        <p:style>
+          <a:lnRef idx="1">
+            <a:schemeClr val="accent1"/>
+          </a:lnRef>
+          <a:fillRef idx="3">
+            <a:schemeClr val="accent1"/>
+          </a:fillRef>
+          <a:effectRef idx="2">
+            <a:schemeClr val="accent1"/>
+          </a:effectRef>
+          <a:fontRef idx="minor">
+            <a:schemeClr val="lt1"/>
+          </a:fontRef>
+        </p:style>
+        <p:txBody>
+          <a:bodyPr rtlCol="0" anchor="ctr"/>
+          <a:lstStyle/>
+          <a:p>
+            <a:pPr algn="ctr"/>
+          </a:p>
+        </p:txBody>
+      </p:sp>
+      <p:sp>
+        <p:nvSpPr>
+          <p:cNvPr id="18" name="TextBox 17"/>
+          <p:cNvSpPr txBox="1"/>
+          <p:nvPr/>
+        </p:nvSpPr>
+        <p:spPr>
+          <a:xfrm>
+            <a:off x="5212080" y="4251960"/>
+            <a:ext cx="548640" cy="457200"/>
+          </a:xfrm>
+          <a:prstGeom prst="rect">
+            <a:avLst/>
+          </a:prstGeom>
+          <a:noFill/>
+        </p:spPr>
+        <p:txBody>
+          <a:bodyPr wrap="none">
+            <a:spAutoFit/>
+          </a:bodyPr>
+          <a:lstStyle/>
+          <a:p>
+            <a:pPr>
+              <a:defRPr sz="3200"/>
+            </a:pPr>
+            <a:r>
+              <a:t>💡</a:t>
+            </a:r>
+          </a:p>
+        </p:txBody>
+      </p:sp>
+      <p:sp>
+        <p:nvSpPr>
+          <p:cNvPr id="19" name="TextBox 18"/>
+          <p:cNvSpPr txBox="1"/>
+          <p:nvPr/>
+        </p:nvSpPr>
+        <p:spPr>
+          <a:xfrm>
+            <a:off x="5212080" y="4754880"/>
+            <a:ext cx="3108960" cy="365760"/>
+          </a:xfrm>
+          <a:prstGeom prst="rect">
+            <a:avLst/>
+          </a:prstGeom>
+          <a:noFill/>
+        </p:spPr>
+        <p:txBody>
+          <a:bodyPr wrap="none">
+            <a:spAutoFit/>
+          </a:bodyPr>
+          <a:lstStyle/>
+          <a:p>
+            <a:pPr>
+              <a:defRPr sz="1600" b="1">
+                <a:solidFill>
+                  <a:srgbClr val="A78BFA"/>
+                </a:solidFill>
+              </a:defRPr>
+            </a:pPr>
+            <a:r>
+              <a:t>اقتراحات ذكية</a:t>
+            </a:r>
+          </a:p>
+        </p:txBody>
+      </p:sp>
+      <p:sp>
+        <p:nvSpPr>
+          <p:cNvPr id="20" name="TextBox 19"/>
+          <p:cNvSpPr txBox="1"/>
+          <p:nvPr/>
+        </p:nvSpPr>
+        <p:spPr>
+          <a:xfrm>
+            <a:off x="5212080" y="5120640"/>
+            <a:ext cx="3108960" cy="548640"/>
+          </a:xfrm>
+          <a:prstGeom prst="rect">
+            <a:avLst/>
+          </a:prstGeom>
+          <a:noFill/>
+        </p:spPr>
+        <p:txBody>
+          <a:bodyPr wrap="square">
+            <a:spAutoFit/>
+          </a:bodyPr>
+          <a:lstStyle/>
+          <a:p>
+            <a:pPr>
+              <a:defRPr sz="1100">
+                <a:solidFill>
+                  <a:srgbClr val="D1D5DB"/>
+                </a:solidFill>
+              </a:defRPr>
+            </a:pPr>
+            <a:r>
+              <a:t>يقدم حلول إبداعية وأفضل الممارسات في البرمجة</a:t>
+            </a:r>
+          </a:p>
+        </p:txBody>
+      </p:sp>
+      <p:sp>
+        <p:nvSpPr>
+          <p:cNvPr id="21" name="TextBox 20"/>
+          <p:cNvSpPr txBox="1"/>
+          <p:nvPr/>
+        </p:nvSpPr>
+        <p:spPr>
+          <a:xfrm>
+            <a:off x="914400" y="5943600"/>
+            <a:ext cx="7315200" cy="822960"/>
+          </a:xfrm>
+          <a:prstGeom prst="rect">
+            <a:avLst/>
+          </a:prstGeom>
+          <a:noFill/>
+        </p:spPr>
+        <p:txBody>
+          <a:bodyPr wrap="none">
+            <a:spAutoFit/>
+          </a:bodyPr>
+          <a:lstStyle/>
+          <a:p>
+            <a:pPr algn="ctr">
+              <a:defRPr sz="1300" b="1">
+                <a:solidFill>
+                  <a:srgbClr val="22C55E"/>
+                </a:solidFill>
+              </a:defRPr>
+            </a:pPr>
+            <a:r>
+              <a:t>💰 طرق الربح: تطوير المشاريع أسرع | إنشاء أدوات برمجية | تقديم خدمات البرمجة | تدريس البرمجة</a:t>
             </a:r>
           </a:p>
         </p:txBody>
